--- a/docs/grano_share_10min.pptx
+++ b/docs/grano_share_10min.pptx
@@ -19,11 +19,6 @@
     <p:sldId id="267" r:id="rId18"/>
     <p:sldId id="268" r:id="rId19"/>
     <p:sldId id="269" r:id="rId20"/>
-    <p:sldId id="270" r:id="rId21"/>
-    <p:sldId id="271" r:id="rId22"/>
-    <p:sldId id="272" r:id="rId23"/>
-    <p:sldId id="273" r:id="rId24"/>
-    <p:sldId id="274" r:id="rId25"/>
   </p:sldIdLst>
   <p:sldSz cx="12191999" cy="6858000" type="screen4x3"/>
   <p:notesSz cx="6858000" cy="9144000"/>
@@ -3150,7 +3145,7 @@
       <p:grpSpPr/>
       <p:pic>
         <p:nvPicPr>
-          <p:cNvPr id="2" name="Picture 1" descr="08_00.jpg"/>
+          <p:cNvPr id="2" name="Picture 1" descr="09_00.jpg"/>
           <p:cNvPicPr>
             <a:picLocks noChangeAspect="1"/>
           </p:cNvPicPr>
@@ -3192,7 +3187,7 @@
       <p:grpSpPr/>
       <p:pic>
         <p:nvPicPr>
-          <p:cNvPr id="2" name="Picture 1" descr="09_00.jpg"/>
+          <p:cNvPr id="2" name="Picture 1" descr="10_00.jpg"/>
           <p:cNvPicPr>
             <a:picLocks noChangeAspect="1"/>
           </p:cNvPicPr>
@@ -3234,7 +3229,7 @@
       <p:grpSpPr/>
       <p:pic>
         <p:nvPicPr>
-          <p:cNvPr id="2" name="Picture 1" descr="09_01.jpg"/>
+          <p:cNvPr id="2" name="Picture 1" descr="11_00.jpg"/>
           <p:cNvPicPr>
             <a:picLocks noChangeAspect="1"/>
           </p:cNvPicPr>
@@ -3276,7 +3271,7 @@
       <p:grpSpPr/>
       <p:pic>
         <p:nvPicPr>
-          <p:cNvPr id="2" name="Picture 1" descr="10_00.jpg"/>
+          <p:cNvPr id="2" name="Picture 1" descr="12_00.jpg"/>
           <p:cNvPicPr>
             <a:picLocks noChangeAspect="1"/>
           </p:cNvPicPr>
@@ -3318,217 +3313,7 @@
       <p:grpSpPr/>
       <p:pic>
         <p:nvPicPr>
-          <p:cNvPr id="2" name="Picture 1" descr="10_01.jpg"/>
-          <p:cNvPicPr>
-            <a:picLocks noChangeAspect="1"/>
-          </p:cNvPicPr>
-          <p:nvPr/>
-        </p:nvPicPr>
-        <p:blipFill>
-          <a:blip r:embed="rId2"/>
-          <a:stretch>
-            <a:fillRect/>
-          </a:stretch>
-        </p:blipFill>
-        <p:spPr>
-          <a:xfrm>
-            <a:off x="0" y="0"/>
-            <a:ext cx="12191999" cy="6858000"/>
-          </a:xfrm>
-          <a:prstGeom prst="rect">
-            <a:avLst/>
-          </a:prstGeom>
-        </p:spPr>
-      </p:pic>
-    </p:spTree>
-  </p:cSld>
-  <p:clrMapOvr>
-    <a:masterClrMapping/>
-  </p:clrMapOvr>
-</p:sld>
-</file>
-
-<file path=ppt/slides/slide15.xml><?xml version="1.0" encoding="utf-8"?>
-<p:sld xmlns:a="http://schemas.openxmlformats.org/drawingml/2006/main" xmlns:p="http://schemas.openxmlformats.org/presentationml/2006/main" xmlns:r="http://schemas.openxmlformats.org/officeDocument/2006/relationships">
-  <p:cSld>
-    <p:spTree>
-      <p:nvGrpSpPr>
-        <p:cNvPr id="1" name=""/>
-        <p:cNvGrpSpPr/>
-        <p:nvPr/>
-      </p:nvGrpSpPr>
-      <p:grpSpPr/>
-      <p:pic>
-        <p:nvPicPr>
-          <p:cNvPr id="2" name="Picture 1" descr="11_00.jpg"/>
-          <p:cNvPicPr>
-            <a:picLocks noChangeAspect="1"/>
-          </p:cNvPicPr>
-          <p:nvPr/>
-        </p:nvPicPr>
-        <p:blipFill>
-          <a:blip r:embed="rId2"/>
-          <a:stretch>
-            <a:fillRect/>
-          </a:stretch>
-        </p:blipFill>
-        <p:spPr>
-          <a:xfrm>
-            <a:off x="0" y="0"/>
-            <a:ext cx="12191999" cy="6858000"/>
-          </a:xfrm>
-          <a:prstGeom prst="rect">
-            <a:avLst/>
-          </a:prstGeom>
-        </p:spPr>
-      </p:pic>
-    </p:spTree>
-  </p:cSld>
-  <p:clrMapOvr>
-    <a:masterClrMapping/>
-  </p:clrMapOvr>
-</p:sld>
-</file>
-
-<file path=ppt/slides/slide16.xml><?xml version="1.0" encoding="utf-8"?>
-<p:sld xmlns:a="http://schemas.openxmlformats.org/drawingml/2006/main" xmlns:p="http://schemas.openxmlformats.org/presentationml/2006/main" xmlns:r="http://schemas.openxmlformats.org/officeDocument/2006/relationships">
-  <p:cSld>
-    <p:spTree>
-      <p:nvGrpSpPr>
-        <p:cNvPr id="1" name=""/>
-        <p:cNvGrpSpPr/>
-        <p:nvPr/>
-      </p:nvGrpSpPr>
-      <p:grpSpPr/>
-      <p:pic>
-        <p:nvPicPr>
-          <p:cNvPr id="2" name="Picture 1" descr="11_01.jpg"/>
-          <p:cNvPicPr>
-            <a:picLocks noChangeAspect="1"/>
-          </p:cNvPicPr>
-          <p:nvPr/>
-        </p:nvPicPr>
-        <p:blipFill>
-          <a:blip r:embed="rId2"/>
-          <a:stretch>
-            <a:fillRect/>
-          </a:stretch>
-        </p:blipFill>
-        <p:spPr>
-          <a:xfrm>
-            <a:off x="0" y="0"/>
-            <a:ext cx="12191999" cy="6858000"/>
-          </a:xfrm>
-          <a:prstGeom prst="rect">
-            <a:avLst/>
-          </a:prstGeom>
-        </p:spPr>
-      </p:pic>
-    </p:spTree>
-  </p:cSld>
-  <p:clrMapOvr>
-    <a:masterClrMapping/>
-  </p:clrMapOvr>
-</p:sld>
-</file>
-
-<file path=ppt/slides/slide17.xml><?xml version="1.0" encoding="utf-8"?>
-<p:sld xmlns:a="http://schemas.openxmlformats.org/drawingml/2006/main" xmlns:p="http://schemas.openxmlformats.org/presentationml/2006/main" xmlns:r="http://schemas.openxmlformats.org/officeDocument/2006/relationships">
-  <p:cSld>
-    <p:spTree>
-      <p:nvGrpSpPr>
-        <p:cNvPr id="1" name=""/>
-        <p:cNvGrpSpPr/>
-        <p:nvPr/>
-      </p:nvGrpSpPr>
-      <p:grpSpPr/>
-      <p:pic>
-        <p:nvPicPr>
-          <p:cNvPr id="2" name="Picture 1" descr="12_00.jpg"/>
-          <p:cNvPicPr>
-            <a:picLocks noChangeAspect="1"/>
-          </p:cNvPicPr>
-          <p:nvPr/>
-        </p:nvPicPr>
-        <p:blipFill>
-          <a:blip r:embed="rId2"/>
-          <a:stretch>
-            <a:fillRect/>
-          </a:stretch>
-        </p:blipFill>
-        <p:spPr>
-          <a:xfrm>
-            <a:off x="0" y="0"/>
-            <a:ext cx="12191999" cy="6858000"/>
-          </a:xfrm>
-          <a:prstGeom prst="rect">
-            <a:avLst/>
-          </a:prstGeom>
-        </p:spPr>
-      </p:pic>
-    </p:spTree>
-  </p:cSld>
-  <p:clrMapOvr>
-    <a:masterClrMapping/>
-  </p:clrMapOvr>
-</p:sld>
-</file>
-
-<file path=ppt/slides/slide18.xml><?xml version="1.0" encoding="utf-8"?>
-<p:sld xmlns:a="http://schemas.openxmlformats.org/drawingml/2006/main" xmlns:p="http://schemas.openxmlformats.org/presentationml/2006/main" xmlns:r="http://schemas.openxmlformats.org/officeDocument/2006/relationships">
-  <p:cSld>
-    <p:spTree>
-      <p:nvGrpSpPr>
-        <p:cNvPr id="1" name=""/>
-        <p:cNvGrpSpPr/>
-        <p:nvPr/>
-      </p:nvGrpSpPr>
-      <p:grpSpPr/>
-      <p:pic>
-        <p:nvPicPr>
           <p:cNvPr id="2" name="Picture 1" descr="13_00.jpg"/>
-          <p:cNvPicPr>
-            <a:picLocks noChangeAspect="1"/>
-          </p:cNvPicPr>
-          <p:nvPr/>
-        </p:nvPicPr>
-        <p:blipFill>
-          <a:blip r:embed="rId2"/>
-          <a:stretch>
-            <a:fillRect/>
-          </a:stretch>
-        </p:blipFill>
-        <p:spPr>
-          <a:xfrm>
-            <a:off x="0" y="0"/>
-            <a:ext cx="12191999" cy="6858000"/>
-          </a:xfrm>
-          <a:prstGeom prst="rect">
-            <a:avLst/>
-          </a:prstGeom>
-        </p:spPr>
-      </p:pic>
-    </p:spTree>
-  </p:cSld>
-  <p:clrMapOvr>
-    <a:masterClrMapping/>
-  </p:clrMapOvr>
-</p:sld>
-</file>
-
-<file path=ppt/slides/slide19.xml><?xml version="1.0" encoding="utf-8"?>
-<p:sld xmlns:a="http://schemas.openxmlformats.org/drawingml/2006/main" xmlns:p="http://schemas.openxmlformats.org/presentationml/2006/main" xmlns:r="http://schemas.openxmlformats.org/officeDocument/2006/relationships">
-  <p:cSld>
-    <p:spTree>
-      <p:nvGrpSpPr>
-        <p:cNvPr id="1" name=""/>
-        <p:cNvGrpSpPr/>
-        <p:nvPr/>
-      </p:nvGrpSpPr>
-      <p:grpSpPr/>
-      <p:pic>
-        <p:nvPicPr>
-          <p:cNvPr id="2" name="Picture 1" descr="13_01.jpg"/>
           <p:cNvPicPr>
             <a:picLocks noChangeAspect="1"/>
           </p:cNvPicPr>
@@ -3738,7 +3523,7 @@
       <p:grpSpPr/>
       <p:pic>
         <p:nvPicPr>
-          <p:cNvPr id="2" name="Picture 1" descr="04_01.jpg"/>
+          <p:cNvPr id="2" name="Picture 1" descr="05_00.jpg"/>
           <p:cNvPicPr>
             <a:picLocks noChangeAspect="1"/>
           </p:cNvPicPr>
@@ -3780,7 +3565,7 @@
       <p:grpSpPr/>
       <p:pic>
         <p:nvPicPr>
-          <p:cNvPr id="2" name="Picture 1" descr="05_00.jpg"/>
+          <p:cNvPr id="2" name="Picture 1" descr="06_00.jpg"/>
           <p:cNvPicPr>
             <a:picLocks noChangeAspect="1"/>
           </p:cNvPicPr>
@@ -3822,7 +3607,7 @@
       <p:grpSpPr/>
       <p:pic>
         <p:nvPicPr>
-          <p:cNvPr id="2" name="Picture 1" descr="06_00.jpg"/>
+          <p:cNvPr id="2" name="Picture 1" descr="07_00.jpg"/>
           <p:cNvPicPr>
             <a:picLocks noChangeAspect="1"/>
           </p:cNvPicPr>
@@ -3864,7 +3649,7 @@
       <p:grpSpPr/>
       <p:pic>
         <p:nvPicPr>
-          <p:cNvPr id="2" name="Picture 1" descr="07_00.jpg"/>
+          <p:cNvPr id="2" name="Picture 1" descr="08_00.jpg"/>
           <p:cNvPicPr>
             <a:picLocks noChangeAspect="1"/>
           </p:cNvPicPr>

--- a/docs/grano_share_10min.pptx
+++ b/docs/grano_share_10min.pptx
@@ -3103,7 +3103,7 @@
       <p:grpSpPr/>
       <p:pic>
         <p:nvPicPr>
-          <p:cNvPr id="2" name="Picture 1" descr="00_00.jpg"/>
+          <p:cNvPr id="2" name="Picture 1" descr="00_bg.jpg"/>
           <p:cNvPicPr>
             <a:picLocks noChangeAspect="1"/>
           </p:cNvPicPr>
@@ -3125,6 +3125,118 @@
           </a:prstGeom>
         </p:spPr>
       </p:pic>
+      <p:sp>
+        <p:nvSpPr>
+          <p:cNvPr id="3" name="TextBox 2"/>
+          <p:cNvSpPr txBox="1"/>
+          <p:nvPr/>
+        </p:nvSpPr>
+        <p:spPr>
+          <a:xfrm>
+            <a:off x="609599" y="3890863"/>
+            <a:ext cx="4577059" cy="1365448"/>
+          </a:xfrm>
+          <a:prstGeom prst="rect">
+            <a:avLst/>
+          </a:prstGeom>
+          <a:noFill/>
+        </p:spPr>
+        <p:txBody>
+          <a:bodyPr wrap="square" lIns="0" rIns="0" tIns="0" bIns="0" anchor="t">
+            <a:spAutoFit/>
+          </a:bodyPr>
+          <a:lstStyle/>
+          <a:p>
+            <a:pPr algn="l">
+              <a:lnSpc>
+                <a:spcPct val="112000"/>
+              </a:lnSpc>
+              <a:spcBef>
+                <a:spcPts val="0"/>
+              </a:spcBef>
+              <a:spcAft>
+                <a:spcPts val="0"/>
+              </a:spcAft>
+              <a:defRPr sz="4800" b="1">
+                <a:solidFill>
+                  <a:srgbClr val="F4EEE4"/>
+                </a:solidFill>
+                <a:latin typeface="Yu Mincho"/>
+              </a:defRPr>
+            </a:pPr>
+            <a:r>
+              <a:t>一人では、</a:t>
+            </a:r>
+          </a:p>
+          <a:p>
+            <a:pPr algn="l">
+              <a:lnSpc>
+                <a:spcPct val="112000"/>
+              </a:lnSpc>
+              <a:spcBef>
+                <a:spcPts val="0"/>
+              </a:spcBef>
+              <a:spcAft>
+                <a:spcPts val="0"/>
+              </a:spcAft>
+              <a:defRPr sz="4800" b="1">
+                <a:solidFill>
+                  <a:srgbClr val="F4EEE4"/>
+                </a:solidFill>
+                <a:latin typeface="Yu Mincho"/>
+              </a:defRPr>
+            </a:pPr>
+            <a:r>
+              <a:t>届かない場所へ。</a:t>
+            </a:r>
+          </a:p>
+        </p:txBody>
+      </p:sp>
+      <p:sp>
+        <p:nvSpPr>
+          <p:cNvPr id="4" name="TextBox 3"/>
+          <p:cNvSpPr txBox="1"/>
+          <p:nvPr/>
+        </p:nvSpPr>
+        <p:spPr>
+          <a:xfrm>
+            <a:off x="609599" y="5448300"/>
+            <a:ext cx="4577059" cy="952500"/>
+          </a:xfrm>
+          <a:prstGeom prst="rect">
+            <a:avLst/>
+          </a:prstGeom>
+          <a:noFill/>
+        </p:spPr>
+        <p:txBody>
+          <a:bodyPr wrap="square" lIns="0" rIns="0" tIns="0" bIns="0" anchor="t">
+            <a:spAutoFit/>
+          </a:bodyPr>
+          <a:lstStyle/>
+          <a:p>
+            <a:pPr algn="l">
+              <a:lnSpc>
+                <a:spcPct val="120000"/>
+              </a:lnSpc>
+              <a:spcBef>
+                <a:spcPts val="0"/>
+              </a:spcBef>
+              <a:spcAft>
+                <a:spcPts val="0"/>
+              </a:spcAft>
+              <a:defRPr sz="2600" b="1">
+                <a:solidFill>
+                  <a:srgbClr val="F4EEE4"/>
+                </a:solidFill>
+                <a:latin typeface="Meiryo"/>
+              </a:defRPr>
+            </a:pPr>
+            <a:r>
+              <a:t>宇部 光太 × 山田 研二 × あらい ひとみ</a:t>
+            </a:r>
+          </a:p>
+        </p:txBody>
+      </p:sp>
     </p:spTree>
   </p:cSld>
   <p:clrMapOvr>
@@ -3145,7 +3257,7 @@
       <p:grpSpPr/>
       <p:pic>
         <p:nvPicPr>
-          <p:cNvPr id="2" name="Picture 1" descr="09_00.jpg"/>
+          <p:cNvPr id="2" name="Picture 1" descr="09_bg.jpg"/>
           <p:cNvPicPr>
             <a:picLocks noChangeAspect="1"/>
           </p:cNvPicPr>
@@ -3167,6 +3279,163 @@
           </a:prstGeom>
         </p:spPr>
       </p:pic>
+      <p:sp>
+        <p:nvSpPr>
+          <p:cNvPr id="3" name="TextBox 2"/>
+          <p:cNvSpPr txBox="1"/>
+          <p:nvPr/>
+        </p:nvSpPr>
+        <p:spPr>
+          <a:xfrm>
+            <a:off x="558799" y="304800"/>
+            <a:ext cx="6280149" cy="457200"/>
+          </a:xfrm>
+          <a:prstGeom prst="rect">
+            <a:avLst/>
+          </a:prstGeom>
+          <a:noFill/>
+        </p:spPr>
+        <p:txBody>
+          <a:bodyPr wrap="square" lIns="0" rIns="0" tIns="0" bIns="0" anchor="t">
+            <a:spAutoFit/>
+          </a:bodyPr>
+          <a:lstStyle/>
+          <a:p>
+            <a:pPr algn="l">
+              <a:lnSpc>
+                <a:spcPct val="120000"/>
+              </a:lnSpc>
+              <a:spcBef>
+                <a:spcPts val="0"/>
+              </a:spcBef>
+              <a:spcAft>
+                <a:spcPts val="0"/>
+              </a:spcAft>
+              <a:defRPr sz="2500" b="1">
+                <a:solidFill>
+                  <a:srgbClr val="D4B36A"/>
+                </a:solidFill>
+                <a:latin typeface="Meiryo"/>
+              </a:defRPr>
+            </a:pPr>
+            <a:r>
+              <a:t>2026年4月1日</a:t>
+            </a:r>
+          </a:p>
+        </p:txBody>
+      </p:sp>
+      <p:sp>
+        <p:nvSpPr>
+          <p:cNvPr id="4" name="TextBox 3"/>
+          <p:cNvSpPr txBox="1"/>
+          <p:nvPr/>
+        </p:nvSpPr>
+        <p:spPr>
+          <a:xfrm>
+            <a:off x="558799" y="857250"/>
+            <a:ext cx="6280149" cy="1508720"/>
+          </a:xfrm>
+          <a:prstGeom prst="rect">
+            <a:avLst/>
+          </a:prstGeom>
+          <a:noFill/>
+        </p:spPr>
+        <p:txBody>
+          <a:bodyPr wrap="square" lIns="0" rIns="0" tIns="0" bIns="0" anchor="t">
+            <a:spAutoFit/>
+          </a:bodyPr>
+          <a:lstStyle/>
+          <a:p>
+            <a:pPr algn="l">
+              <a:lnSpc>
+                <a:spcPct val="110000"/>
+              </a:lnSpc>
+              <a:spcBef>
+                <a:spcPts val="0"/>
+              </a:spcBef>
+              <a:spcAft>
+                <a:spcPts val="0"/>
+              </a:spcAft>
+              <a:defRPr sz="5400" b="1">
+                <a:solidFill>
+                  <a:srgbClr val="F4EEE4"/>
+                </a:solidFill>
+                <a:latin typeface="Yu Mincho"/>
+              </a:defRPr>
+            </a:pPr>
+            <a:r>
+              <a:t>覚悟が、</a:t>
+            </a:r>
+          </a:p>
+          <a:p>
+            <a:pPr algn="l">
+              <a:lnSpc>
+                <a:spcPct val="110000"/>
+              </a:lnSpc>
+              <a:spcBef>
+                <a:spcPts val="0"/>
+              </a:spcBef>
+              <a:spcAft>
+                <a:spcPts val="0"/>
+              </a:spcAft>
+              <a:defRPr sz="5400" b="1">
+                <a:solidFill>
+                  <a:srgbClr val="F4EEE4"/>
+                </a:solidFill>
+                <a:latin typeface="Yu Mincho"/>
+              </a:defRPr>
+            </a:pPr>
+            <a:r>
+              <a:t>法人になった。</a:t>
+            </a:r>
+          </a:p>
+        </p:txBody>
+      </p:sp>
+      <p:sp>
+        <p:nvSpPr>
+          <p:cNvPr id="5" name="TextBox 4"/>
+          <p:cNvSpPr txBox="1"/>
+          <p:nvPr/>
+        </p:nvSpPr>
+        <p:spPr>
+          <a:xfrm>
+            <a:off x="7092949" y="5762029"/>
+            <a:ext cx="4641849" cy="613370"/>
+          </a:xfrm>
+          <a:prstGeom prst="rect">
+            <a:avLst/>
+          </a:prstGeom>
+          <a:noFill/>
+        </p:spPr>
+        <p:txBody>
+          <a:bodyPr wrap="square" lIns="0" rIns="0" tIns="0" bIns="0" anchor="t">
+            <a:spAutoFit/>
+          </a:bodyPr>
+          <a:lstStyle/>
+          <a:p>
+            <a:pPr algn="l">
+              <a:lnSpc>
+                <a:spcPct val="105000"/>
+              </a:lnSpc>
+              <a:spcBef>
+                <a:spcPts val="0"/>
+              </a:spcBef>
+              <a:spcAft>
+                <a:spcPts val="0"/>
+              </a:spcAft>
+              <a:defRPr sz="4600" b="1">
+                <a:solidFill>
+                  <a:srgbClr val="F3DDB0"/>
+                </a:solidFill>
+                <a:latin typeface="Yu Mincho"/>
+              </a:defRPr>
+            </a:pPr>
+            <a:r>
+              <a:t>RG株式会社</a:t>
+            </a:r>
+          </a:p>
+        </p:txBody>
+      </p:sp>
     </p:spTree>
   </p:cSld>
   <p:clrMapOvr>
@@ -3187,7 +3456,7 @@
       <p:grpSpPr/>
       <p:pic>
         <p:nvPicPr>
-          <p:cNvPr id="2" name="Picture 1" descr="10_00.jpg"/>
+          <p:cNvPr id="2" name="Picture 1" descr="10_bg.jpg"/>
           <p:cNvPicPr>
             <a:picLocks noChangeAspect="1"/>
           </p:cNvPicPr>
@@ -3209,6 +3478,253 @@
           </a:prstGeom>
         </p:spPr>
       </p:pic>
+      <p:sp>
+        <p:nvSpPr>
+          <p:cNvPr id="3" name="TextBox 2"/>
+          <p:cNvSpPr txBox="1"/>
+          <p:nvPr/>
+        </p:nvSpPr>
+        <p:spPr>
+          <a:xfrm>
+            <a:off x="609599" y="1391146"/>
+            <a:ext cx="9662119" cy="1752599"/>
+          </a:xfrm>
+          <a:prstGeom prst="rect">
+            <a:avLst/>
+          </a:prstGeom>
+          <a:noFill/>
+        </p:spPr>
+        <p:txBody>
+          <a:bodyPr wrap="square" lIns="0" rIns="0" tIns="0" bIns="0" anchor="t">
+            <a:spAutoFit/>
+          </a:bodyPr>
+          <a:lstStyle/>
+          <a:p>
+            <a:pPr algn="l">
+              <a:lnSpc>
+                <a:spcPct val="115000"/>
+              </a:lnSpc>
+              <a:spcBef>
+                <a:spcPts val="0"/>
+              </a:spcBef>
+              <a:spcAft>
+                <a:spcPts val="0"/>
+              </a:spcAft>
+              <a:defRPr sz="6000" b="1">
+                <a:solidFill>
+                  <a:srgbClr val="F4EEE4"/>
+                </a:solidFill>
+                <a:latin typeface="Yu Mincho"/>
+              </a:defRPr>
+            </a:pPr>
+            <a:r>
+              <a:t>仲が良いだけでは、</a:t>
+            </a:r>
+          </a:p>
+          <a:p>
+            <a:pPr algn="l">
+              <a:lnSpc>
+                <a:spcPct val="115000"/>
+              </a:lnSpc>
+              <a:spcBef>
+                <a:spcPts val="0"/>
+              </a:spcBef>
+              <a:spcAft>
+                <a:spcPts val="0"/>
+              </a:spcAft>
+              <a:defRPr sz="6000" b="1">
+                <a:solidFill>
+                  <a:srgbClr val="F4EEE4"/>
+                </a:solidFill>
+                <a:latin typeface="Yu Mincho"/>
+              </a:defRPr>
+            </a:pPr>
+            <a:r>
+              <a:t>日本一になれない。</a:t>
+            </a:r>
+          </a:p>
+        </p:txBody>
+      </p:sp>
+      <p:sp>
+        <p:nvSpPr>
+          <p:cNvPr id="4" name="TextBox 3"/>
+          <p:cNvSpPr txBox="1"/>
+          <p:nvPr/>
+        </p:nvSpPr>
+        <p:spPr>
+          <a:xfrm>
+            <a:off x="609599" y="3261717"/>
+            <a:ext cx="4665959" cy="698500"/>
+          </a:xfrm>
+          <a:prstGeom prst="rect">
+            <a:avLst/>
+          </a:prstGeom>
+          <a:noFill/>
+        </p:spPr>
+        <p:txBody>
+          <a:bodyPr wrap="square" lIns="0" rIns="0" tIns="0" bIns="0" anchor="t">
+            <a:spAutoFit/>
+          </a:bodyPr>
+          <a:lstStyle/>
+          <a:p>
+            <a:pPr algn="l">
+              <a:lnSpc>
+                <a:spcPct val="125000"/>
+              </a:lnSpc>
+              <a:spcBef>
+                <a:spcPts val="0"/>
+              </a:spcBef>
+              <a:spcAft>
+                <a:spcPts val="0"/>
+              </a:spcAft>
+              <a:defRPr sz="4400" b="1">
+                <a:solidFill>
+                  <a:srgbClr val="F4EEE4"/>
+                </a:solidFill>
+                <a:latin typeface="Yu Mincho"/>
+              </a:defRPr>
+            </a:pPr>
+            <a:r>
+              <a:t>まず挑戦する</a:t>
+            </a:r>
+          </a:p>
+        </p:txBody>
+      </p:sp>
+      <p:sp>
+        <p:nvSpPr>
+          <p:cNvPr id="5" name="TextBox 4"/>
+          <p:cNvSpPr txBox="1"/>
+          <p:nvPr/>
+        </p:nvSpPr>
+        <p:spPr>
+          <a:xfrm>
+            <a:off x="5605759" y="3261717"/>
+            <a:ext cx="4665959" cy="698500"/>
+          </a:xfrm>
+          <a:prstGeom prst="rect">
+            <a:avLst/>
+          </a:prstGeom>
+          <a:noFill/>
+        </p:spPr>
+        <p:txBody>
+          <a:bodyPr wrap="square" lIns="0" rIns="0" tIns="0" bIns="0" anchor="t">
+            <a:spAutoFit/>
+          </a:bodyPr>
+          <a:lstStyle/>
+          <a:p>
+            <a:pPr algn="l">
+              <a:lnSpc>
+                <a:spcPct val="125000"/>
+              </a:lnSpc>
+              <a:spcBef>
+                <a:spcPts val="0"/>
+              </a:spcBef>
+              <a:spcAft>
+                <a:spcPts val="0"/>
+              </a:spcAft>
+              <a:defRPr sz="4400" b="1">
+                <a:solidFill>
+                  <a:srgbClr val="F4EEE4"/>
+                </a:solidFill>
+                <a:latin typeface="Yu Mincho"/>
+              </a:defRPr>
+            </a:pPr>
+            <a:r>
+              <a:t>やるなら全力</a:t>
+            </a:r>
+          </a:p>
+        </p:txBody>
+      </p:sp>
+      <p:sp>
+        <p:nvSpPr>
+          <p:cNvPr id="6" name="TextBox 5"/>
+          <p:cNvSpPr txBox="1"/>
+          <p:nvPr/>
+        </p:nvSpPr>
+        <p:spPr>
+          <a:xfrm>
+            <a:off x="609599" y="4072830"/>
+            <a:ext cx="4665959" cy="698500"/>
+          </a:xfrm>
+          <a:prstGeom prst="rect">
+            <a:avLst/>
+          </a:prstGeom>
+          <a:noFill/>
+        </p:spPr>
+        <p:txBody>
+          <a:bodyPr wrap="square" lIns="0" rIns="0" tIns="0" bIns="0" anchor="t">
+            <a:spAutoFit/>
+          </a:bodyPr>
+          <a:lstStyle/>
+          <a:p>
+            <a:pPr algn="l">
+              <a:lnSpc>
+                <a:spcPct val="125000"/>
+              </a:lnSpc>
+              <a:spcBef>
+                <a:spcPts val="0"/>
+              </a:spcBef>
+              <a:spcAft>
+                <a:spcPts val="0"/>
+              </a:spcAft>
+              <a:defRPr sz="4400" b="1">
+                <a:solidFill>
+                  <a:srgbClr val="F4EEE4"/>
+                </a:solidFill>
+                <a:latin typeface="Yu Mincho"/>
+              </a:defRPr>
+            </a:pPr>
+            <a:r>
+              <a:t>人を陥れない</a:t>
+            </a:r>
+          </a:p>
+        </p:txBody>
+      </p:sp>
+      <p:sp>
+        <p:nvSpPr>
+          <p:cNvPr id="7" name="TextBox 6"/>
+          <p:cNvSpPr txBox="1"/>
+          <p:nvPr/>
+        </p:nvSpPr>
+        <p:spPr>
+          <a:xfrm>
+            <a:off x="5605759" y="4072830"/>
+            <a:ext cx="4665959" cy="1397000"/>
+          </a:xfrm>
+          <a:prstGeom prst="rect">
+            <a:avLst/>
+          </a:prstGeom>
+          <a:noFill/>
+        </p:spPr>
+        <p:txBody>
+          <a:bodyPr wrap="square" lIns="0" rIns="0" tIns="0" bIns="0" anchor="t">
+            <a:spAutoFit/>
+          </a:bodyPr>
+          <a:lstStyle/>
+          <a:p>
+            <a:pPr algn="l">
+              <a:lnSpc>
+                <a:spcPct val="125000"/>
+              </a:lnSpc>
+              <a:spcBef>
+                <a:spcPts val="0"/>
+              </a:spcBef>
+              <a:spcAft>
+                <a:spcPts val="0"/>
+              </a:spcAft>
+              <a:defRPr sz="4400" b="1">
+                <a:solidFill>
+                  <a:srgbClr val="F4EEE4"/>
+                </a:solidFill>
+                <a:latin typeface="Yu Mincho"/>
+              </a:defRPr>
+            </a:pPr>
+            <a:r>
+              <a:t>リスクも、一緒に</a:t>
+            </a:r>
+          </a:p>
+        </p:txBody>
+      </p:sp>
     </p:spTree>
   </p:cSld>
   <p:clrMapOvr>
@@ -3229,7 +3745,7 @@
       <p:grpSpPr/>
       <p:pic>
         <p:nvPicPr>
-          <p:cNvPr id="2" name="Picture 1" descr="11_00.jpg"/>
+          <p:cNvPr id="2" name="Picture 1" descr="11_bg.jpg"/>
           <p:cNvPicPr>
             <a:picLocks noChangeAspect="1"/>
           </p:cNvPicPr>
@@ -3251,6 +3767,276 @@
           </a:prstGeom>
         </p:spPr>
       </p:pic>
+      <p:sp>
+        <p:nvSpPr>
+          <p:cNvPr id="3" name="TextBox 2"/>
+          <p:cNvSpPr txBox="1"/>
+          <p:nvPr/>
+        </p:nvSpPr>
+        <p:spPr>
+          <a:xfrm>
+            <a:off x="609599" y="2735560"/>
+            <a:ext cx="3386633" cy="838200"/>
+          </a:xfrm>
+          <a:prstGeom prst="rect">
+            <a:avLst/>
+          </a:prstGeom>
+          <a:noFill/>
+        </p:spPr>
+        <p:txBody>
+          <a:bodyPr wrap="square" lIns="0" rIns="0" tIns="0" bIns="0" anchor="t">
+            <a:spAutoFit/>
+          </a:bodyPr>
+          <a:lstStyle/>
+          <a:p>
+            <a:pPr algn="l">
+              <a:lnSpc>
+                <a:spcPct val="100000"/>
+              </a:lnSpc>
+              <a:spcBef>
+                <a:spcPts val="0"/>
+              </a:spcBef>
+              <a:spcAft>
+                <a:spcPts val="0"/>
+              </a:spcAft>
+              <a:defRPr sz="6600" b="0">
+                <a:solidFill>
+                  <a:srgbClr val="F3DDB0"/>
+                </a:solidFill>
+                <a:latin typeface="Yu Mincho"/>
+              </a:defRPr>
+            </a:pPr>
+            <a:r>
+              <a:t>5店舗</a:t>
+            </a:r>
+          </a:p>
+        </p:txBody>
+      </p:sp>
+      <p:sp>
+        <p:nvSpPr>
+          <p:cNvPr id="4" name="TextBox 3"/>
+          <p:cNvSpPr txBox="1"/>
+          <p:nvPr/>
+        </p:nvSpPr>
+        <p:spPr>
+          <a:xfrm>
+            <a:off x="609599" y="3733700"/>
+            <a:ext cx="3386633" cy="514350"/>
+          </a:xfrm>
+          <a:prstGeom prst="rect">
+            <a:avLst/>
+          </a:prstGeom>
+          <a:noFill/>
+        </p:spPr>
+        <p:txBody>
+          <a:bodyPr wrap="square" lIns="0" rIns="0" tIns="0" bIns="0" anchor="t">
+            <a:spAutoFit/>
+          </a:bodyPr>
+          <a:lstStyle/>
+          <a:p>
+            <a:pPr algn="l">
+              <a:lnSpc>
+                <a:spcPct val="120000"/>
+              </a:lnSpc>
+              <a:spcBef>
+                <a:spcPts val="0"/>
+              </a:spcBef>
+              <a:spcAft>
+                <a:spcPts val="0"/>
+              </a:spcAft>
+              <a:defRPr sz="2800" b="1">
+                <a:solidFill>
+                  <a:srgbClr val="F4EEE4"/>
+                </a:solidFill>
+                <a:latin typeface="Meiryo"/>
+              </a:defRPr>
+            </a:pPr>
+            <a:r>
+              <a:t>ネイルFC</a:t>
+            </a:r>
+          </a:p>
+        </p:txBody>
+      </p:sp>
+      <p:sp>
+        <p:nvSpPr>
+          <p:cNvPr id="5" name="TextBox 4"/>
+          <p:cNvSpPr txBox="1"/>
+          <p:nvPr/>
+        </p:nvSpPr>
+        <p:spPr>
+          <a:xfrm>
+            <a:off x="4402633" y="2735560"/>
+            <a:ext cx="3386633" cy="838200"/>
+          </a:xfrm>
+          <a:prstGeom prst="rect">
+            <a:avLst/>
+          </a:prstGeom>
+          <a:noFill/>
+        </p:spPr>
+        <p:txBody>
+          <a:bodyPr wrap="square" lIns="0" rIns="0" tIns="0" bIns="0" anchor="t">
+            <a:spAutoFit/>
+          </a:bodyPr>
+          <a:lstStyle/>
+          <a:p>
+            <a:pPr algn="l">
+              <a:lnSpc>
+                <a:spcPct val="100000"/>
+              </a:lnSpc>
+              <a:spcBef>
+                <a:spcPts val="0"/>
+              </a:spcBef>
+              <a:spcAft>
+                <a:spcPts val="0"/>
+              </a:spcAft>
+              <a:defRPr sz="6600" b="0">
+                <a:solidFill>
+                  <a:srgbClr val="F3DDB0"/>
+                </a:solidFill>
+                <a:latin typeface="Yu Mincho"/>
+              </a:defRPr>
+            </a:pPr>
+            <a:r>
+              <a:t>3店舗</a:t>
+            </a:r>
+          </a:p>
+        </p:txBody>
+      </p:sp>
+      <p:sp>
+        <p:nvSpPr>
+          <p:cNvPr id="6" name="TextBox 5"/>
+          <p:cNvSpPr txBox="1"/>
+          <p:nvPr/>
+        </p:nvSpPr>
+        <p:spPr>
+          <a:xfrm>
+            <a:off x="4402633" y="3733700"/>
+            <a:ext cx="3386633" cy="514350"/>
+          </a:xfrm>
+          <a:prstGeom prst="rect">
+            <a:avLst/>
+          </a:prstGeom>
+          <a:noFill/>
+        </p:spPr>
+        <p:txBody>
+          <a:bodyPr wrap="square" lIns="0" rIns="0" tIns="0" bIns="0" anchor="t">
+            <a:spAutoFit/>
+          </a:bodyPr>
+          <a:lstStyle/>
+          <a:p>
+            <a:pPr algn="l">
+              <a:lnSpc>
+                <a:spcPct val="120000"/>
+              </a:lnSpc>
+              <a:spcBef>
+                <a:spcPts val="0"/>
+              </a:spcBef>
+              <a:spcAft>
+                <a:spcPts val="0"/>
+              </a:spcAft>
+              <a:defRPr sz="2800" b="1">
+                <a:solidFill>
+                  <a:srgbClr val="F4EEE4"/>
+                </a:solidFill>
+                <a:latin typeface="Meiryo"/>
+              </a:defRPr>
+            </a:pPr>
+            <a:r>
+              <a:t>かき氷FC</a:t>
+            </a:r>
+          </a:p>
+        </p:txBody>
+      </p:sp>
+      <p:sp>
+        <p:nvSpPr>
+          <p:cNvPr id="7" name="TextBox 6"/>
+          <p:cNvSpPr txBox="1"/>
+          <p:nvPr/>
+        </p:nvSpPr>
+        <p:spPr>
+          <a:xfrm>
+            <a:off x="8195666" y="2735560"/>
+            <a:ext cx="3386633" cy="838200"/>
+          </a:xfrm>
+          <a:prstGeom prst="rect">
+            <a:avLst/>
+          </a:prstGeom>
+          <a:noFill/>
+        </p:spPr>
+        <p:txBody>
+          <a:bodyPr wrap="square" lIns="0" rIns="0" tIns="0" bIns="0" anchor="t">
+            <a:spAutoFit/>
+          </a:bodyPr>
+          <a:lstStyle/>
+          <a:p>
+            <a:pPr algn="l">
+              <a:lnSpc>
+                <a:spcPct val="100000"/>
+              </a:lnSpc>
+              <a:spcBef>
+                <a:spcPts val="0"/>
+              </a:spcBef>
+              <a:spcAft>
+                <a:spcPts val="0"/>
+              </a:spcAft>
+              <a:defRPr sz="6600" b="0">
+                <a:solidFill>
+                  <a:srgbClr val="F3DDB0"/>
+                </a:solidFill>
+                <a:latin typeface="Yu Mincho"/>
+              </a:defRPr>
+            </a:pPr>
+            <a:r>
+              <a:t>1億</a:t>
+            </a:r>
+          </a:p>
+        </p:txBody>
+      </p:sp>
+      <p:sp>
+        <p:nvSpPr>
+          <p:cNvPr id="8" name="TextBox 7"/>
+          <p:cNvSpPr txBox="1"/>
+          <p:nvPr/>
+        </p:nvSpPr>
+        <p:spPr>
+          <a:xfrm>
+            <a:off x="8195666" y="3733700"/>
+            <a:ext cx="3386633" cy="514350"/>
+          </a:xfrm>
+          <a:prstGeom prst="rect">
+            <a:avLst/>
+          </a:prstGeom>
+          <a:noFill/>
+        </p:spPr>
+        <p:txBody>
+          <a:bodyPr wrap="square" lIns="0" rIns="0" tIns="0" bIns="0" anchor="t">
+            <a:spAutoFit/>
+          </a:bodyPr>
+          <a:lstStyle/>
+          <a:p>
+            <a:pPr algn="l">
+              <a:lnSpc>
+                <a:spcPct val="120000"/>
+              </a:lnSpc>
+              <a:spcBef>
+                <a:spcPts val="0"/>
+              </a:spcBef>
+              <a:spcAft>
+                <a:spcPts val="0"/>
+              </a:spcAft>
+              <a:defRPr sz="2800" b="1">
+                <a:solidFill>
+                  <a:srgbClr val="F4EEE4"/>
+                </a:solidFill>
+                <a:latin typeface="Meiryo"/>
+              </a:defRPr>
+            </a:pPr>
+            <a:r>
+              <a:t>次は年商</a:t>
+            </a:r>
+          </a:p>
+        </p:txBody>
+      </p:sp>
     </p:spTree>
   </p:cSld>
   <p:clrMapOvr>
@@ -3271,7 +4057,7 @@
       <p:grpSpPr/>
       <p:pic>
         <p:nvPicPr>
-          <p:cNvPr id="2" name="Picture 1" descr="12_00.jpg"/>
+          <p:cNvPr id="2" name="Picture 1" descr="12_bg.jpg"/>
           <p:cNvPicPr>
             <a:picLocks noChangeAspect="1"/>
           </p:cNvPicPr>
@@ -3293,6 +4079,73 @@
           </a:prstGeom>
         </p:spPr>
       </p:pic>
+      <p:sp>
+        <p:nvSpPr>
+          <p:cNvPr id="3" name="TextBox 2"/>
+          <p:cNvSpPr txBox="1"/>
+          <p:nvPr/>
+        </p:nvSpPr>
+        <p:spPr>
+          <a:xfrm>
+            <a:off x="609599" y="2561828"/>
+            <a:ext cx="9662119" cy="1752599"/>
+          </a:xfrm>
+          <a:prstGeom prst="rect">
+            <a:avLst/>
+          </a:prstGeom>
+          <a:noFill/>
+        </p:spPr>
+        <p:txBody>
+          <a:bodyPr wrap="square" lIns="0" rIns="0" tIns="0" bIns="0" anchor="t">
+            <a:spAutoFit/>
+          </a:bodyPr>
+          <a:lstStyle/>
+          <a:p>
+            <a:pPr algn="l">
+              <a:lnSpc>
+                <a:spcPct val="115000"/>
+              </a:lnSpc>
+              <a:spcBef>
+                <a:spcPts val="0"/>
+              </a:spcBef>
+              <a:spcAft>
+                <a:spcPts val="0"/>
+              </a:spcAft>
+              <a:defRPr sz="6000" b="1">
+                <a:solidFill>
+                  <a:srgbClr val="F4EEE4"/>
+                </a:solidFill>
+                <a:latin typeface="Yu Mincho"/>
+              </a:defRPr>
+            </a:pPr>
+            <a:r>
+              <a:t>あと10年早く、</a:t>
+            </a:r>
+          </a:p>
+          <a:p>
+            <a:pPr algn="l">
+              <a:lnSpc>
+                <a:spcPct val="115000"/>
+              </a:lnSpc>
+              <a:spcBef>
+                <a:spcPts val="0"/>
+              </a:spcBef>
+              <a:spcAft>
+                <a:spcPts val="0"/>
+              </a:spcAft>
+              <a:defRPr sz="6000" b="1">
+                <a:solidFill>
+                  <a:srgbClr val="F4EEE4"/>
+                </a:solidFill>
+                <a:latin typeface="Yu Mincho"/>
+              </a:defRPr>
+            </a:pPr>
+            <a:r>
+              <a:t>出会えていたら。</a:t>
+            </a:r>
+          </a:p>
+        </p:txBody>
+      </p:sp>
     </p:spTree>
   </p:cSld>
   <p:clrMapOvr>
@@ -3313,7 +4166,7 @@
       <p:grpSpPr/>
       <p:pic>
         <p:nvPicPr>
-          <p:cNvPr id="2" name="Picture 1" descr="13_00.jpg"/>
+          <p:cNvPr id="2" name="Picture 1" descr="13_bg.jpg"/>
           <p:cNvPicPr>
             <a:picLocks noChangeAspect="1"/>
           </p:cNvPicPr>
@@ -3335,6 +4188,163 @@
           </a:prstGeom>
         </p:spPr>
       </p:pic>
+      <p:sp>
+        <p:nvSpPr>
+          <p:cNvPr id="3" name="TextBox 2"/>
+          <p:cNvSpPr txBox="1"/>
+          <p:nvPr/>
+        </p:nvSpPr>
+        <p:spPr>
+          <a:xfrm>
+            <a:off x="609599" y="2158107"/>
+            <a:ext cx="5760640" cy="1752599"/>
+          </a:xfrm>
+          <a:prstGeom prst="rect">
+            <a:avLst/>
+          </a:prstGeom>
+          <a:noFill/>
+        </p:spPr>
+        <p:txBody>
+          <a:bodyPr wrap="square" lIns="0" rIns="0" tIns="0" bIns="0" anchor="t">
+            <a:spAutoFit/>
+          </a:bodyPr>
+          <a:lstStyle/>
+          <a:p>
+            <a:pPr algn="l">
+              <a:lnSpc>
+                <a:spcPct val="115000"/>
+              </a:lnSpc>
+              <a:spcBef>
+                <a:spcPts val="0"/>
+              </a:spcBef>
+              <a:spcAft>
+                <a:spcPts val="0"/>
+              </a:spcAft>
+              <a:defRPr sz="6000" b="1">
+                <a:solidFill>
+                  <a:srgbClr val="F3DDB0"/>
+                </a:solidFill>
+                <a:latin typeface="Yu Mincho"/>
+              </a:defRPr>
+            </a:pPr>
+            <a:r>
+              <a:t>だから、</a:t>
+            </a:r>
+          </a:p>
+          <a:p>
+            <a:pPr algn="l">
+              <a:lnSpc>
+                <a:spcPct val="115000"/>
+              </a:lnSpc>
+              <a:spcBef>
+                <a:spcPts val="0"/>
+              </a:spcBef>
+              <a:spcAft>
+                <a:spcPts val="0"/>
+              </a:spcAft>
+              <a:defRPr sz="6000" b="1">
+                <a:solidFill>
+                  <a:srgbClr val="F3DDB0"/>
+                </a:solidFill>
+                <a:latin typeface="Yu Mincho"/>
+              </a:defRPr>
+            </a:pPr>
+            <a:r>
+              <a:t>NOVUSを。</a:t>
+            </a:r>
+          </a:p>
+        </p:txBody>
+      </p:sp>
+      <p:sp>
+        <p:nvSpPr>
+          <p:cNvPr id="4" name="TextBox 3"/>
+          <p:cNvSpPr txBox="1"/>
+          <p:nvPr/>
+        </p:nvSpPr>
+        <p:spPr>
+          <a:xfrm>
+            <a:off x="609599" y="4061519"/>
+            <a:ext cx="5760640" cy="631130"/>
+          </a:xfrm>
+          <a:prstGeom prst="rect">
+            <a:avLst/>
+          </a:prstGeom>
+          <a:noFill/>
+        </p:spPr>
+        <p:txBody>
+          <a:bodyPr wrap="square" lIns="0" rIns="0" tIns="0" bIns="0" anchor="t">
+            <a:spAutoFit/>
+          </a:bodyPr>
+          <a:lstStyle/>
+          <a:p>
+            <a:pPr algn="l">
+              <a:lnSpc>
+                <a:spcPct val="142000"/>
+              </a:lnSpc>
+              <a:spcBef>
+                <a:spcPts val="0"/>
+              </a:spcBef>
+              <a:spcAft>
+                <a:spcPts val="0"/>
+              </a:spcAft>
+              <a:defRPr sz="3500" b="0">
+                <a:solidFill>
+                  <a:srgbClr val="F4EEE4"/>
+                </a:solidFill>
+                <a:latin typeface="Meiryo"/>
+              </a:defRPr>
+            </a:pPr>
+            <a:r>
+              <a:t>40歳以下。０から１を。</a:t>
+            </a:r>
+          </a:p>
+        </p:txBody>
+      </p:sp>
+      <p:sp>
+        <p:nvSpPr>
+          <p:cNvPr id="5" name="TextBox 4"/>
+          <p:cNvSpPr txBox="1"/>
+          <p:nvPr/>
+        </p:nvSpPr>
+        <p:spPr>
+          <a:xfrm>
+            <a:off x="6715818" y="3051770"/>
+            <a:ext cx="5232399" cy="1028700"/>
+          </a:xfrm>
+          <a:prstGeom prst="rect">
+            <a:avLst/>
+          </a:prstGeom>
+          <a:noFill/>
+        </p:spPr>
+        <p:txBody>
+          <a:bodyPr wrap="square" lIns="0" rIns="0" tIns="0" bIns="0" anchor="t">
+            <a:spAutoFit/>
+          </a:bodyPr>
+          <a:lstStyle/>
+          <a:p>
+            <a:pPr algn="l">
+              <a:lnSpc>
+                <a:spcPct val="90000"/>
+              </a:lnSpc>
+              <a:spcBef>
+                <a:spcPts val="0"/>
+              </a:spcBef>
+              <a:spcAft>
+                <a:spcPts val="0"/>
+              </a:spcAft>
+              <a:defRPr sz="9000" b="1">
+                <a:solidFill>
+                  <a:srgbClr val="F3DDB0"/>
+                </a:solidFill>
+                <a:latin typeface="Yu Mincho"/>
+              </a:defRPr>
+            </a:pPr>
+            <a:r>
+              <a:t>NOVUS</a:t>
+            </a:r>
+          </a:p>
+        </p:txBody>
+      </p:sp>
     </p:spTree>
   </p:cSld>
   <p:clrMapOvr>
@@ -3355,7 +4365,7 @@
       <p:grpSpPr/>
       <p:pic>
         <p:nvPicPr>
-          <p:cNvPr id="2" name="Picture 1" descr="01_00.jpg"/>
+          <p:cNvPr id="2" name="Picture 1" descr="01_bg.jpg"/>
           <p:cNvPicPr>
             <a:picLocks noChangeAspect="1"/>
           </p:cNvPicPr>
@@ -3377,6 +4387,231 @@
           </a:prstGeom>
         </p:spPr>
       </p:pic>
+      <p:sp>
+        <p:nvSpPr>
+          <p:cNvPr id="3" name="TextBox 2"/>
+          <p:cNvSpPr txBox="1"/>
+          <p:nvPr/>
+        </p:nvSpPr>
+        <p:spPr>
+          <a:xfrm>
+            <a:off x="406399" y="150812"/>
+            <a:ext cx="11379199" cy="349250"/>
+          </a:xfrm>
+          <a:prstGeom prst="rect">
+            <a:avLst/>
+          </a:prstGeom>
+          <a:noFill/>
+        </p:spPr>
+        <p:txBody>
+          <a:bodyPr wrap="square" lIns="0" rIns="0" tIns="0" bIns="0" anchor="t">
+            <a:spAutoFit/>
+          </a:bodyPr>
+          <a:lstStyle/>
+          <a:p>
+            <a:pPr algn="l">
+              <a:lnSpc>
+                <a:spcPct val="120000"/>
+              </a:lnSpc>
+              <a:spcBef>
+                <a:spcPts val="0"/>
+              </a:spcBef>
+              <a:spcAft>
+                <a:spcPts val="0"/>
+              </a:spcAft>
+              <a:defRPr sz="2400" b="1">
+                <a:solidFill>
+                  <a:srgbClr val="D4B36A"/>
+                </a:solidFill>
+                <a:latin typeface="Meiryo"/>
+              </a:defRPr>
+            </a:pPr>
+            <a:r>
+              <a:t>2025年春</a:t>
+            </a:r>
+          </a:p>
+        </p:txBody>
+      </p:sp>
+      <p:sp>
+        <p:nvSpPr>
+          <p:cNvPr id="4" name="TextBox 3"/>
+          <p:cNvSpPr txBox="1"/>
+          <p:nvPr/>
+        </p:nvSpPr>
+        <p:spPr>
+          <a:xfrm>
+            <a:off x="406399" y="596007"/>
+            <a:ext cx="11379199" cy="584200"/>
+          </a:xfrm>
+          <a:prstGeom prst="rect">
+            <a:avLst/>
+          </a:prstGeom>
+          <a:noFill/>
+        </p:spPr>
+        <p:txBody>
+          <a:bodyPr wrap="square" lIns="0" rIns="0" tIns="0" bIns="0" anchor="t">
+            <a:spAutoFit/>
+          </a:bodyPr>
+          <a:lstStyle/>
+          <a:p>
+            <a:pPr algn="l">
+              <a:lnSpc>
+                <a:spcPct val="115000"/>
+              </a:lnSpc>
+              <a:spcBef>
+                <a:spcPts val="0"/>
+              </a:spcBef>
+              <a:spcAft>
+                <a:spcPts val="0"/>
+              </a:spcAft>
+              <a:defRPr sz="4000" b="1">
+                <a:solidFill>
+                  <a:srgbClr val="F4EEE4"/>
+                </a:solidFill>
+                <a:latin typeface="Yu Mincho"/>
+              </a:defRPr>
+            </a:pPr>
+            <a:r>
+              <a:t>三人は、別々の道を歩いていた。</a:t>
+            </a:r>
+          </a:p>
+        </p:txBody>
+      </p:sp>
+      <p:sp>
+        <p:nvSpPr>
+          <p:cNvPr id="5" name="TextBox 4"/>
+          <p:cNvSpPr txBox="1"/>
+          <p:nvPr/>
+        </p:nvSpPr>
+        <p:spPr>
+          <a:xfrm>
+            <a:off x="406399" y="6178550"/>
+            <a:ext cx="3674466" cy="501649"/>
+          </a:xfrm>
+          <a:prstGeom prst="rect">
+            <a:avLst/>
+          </a:prstGeom>
+          <a:noFill/>
+        </p:spPr>
+        <p:txBody>
+          <a:bodyPr wrap="square" lIns="0" rIns="0" tIns="0" bIns="0" anchor="t">
+            <a:spAutoFit/>
+          </a:bodyPr>
+          <a:lstStyle/>
+          <a:p>
+            <a:pPr algn="l">
+              <a:lnSpc>
+                <a:spcPct val="120000"/>
+              </a:lnSpc>
+              <a:spcBef>
+                <a:spcPts val="0"/>
+              </a:spcBef>
+              <a:spcAft>
+                <a:spcPts val="0"/>
+              </a:spcAft>
+              <a:defRPr sz="2700" b="1">
+                <a:solidFill>
+                  <a:srgbClr val="F4EEE4"/>
+                </a:solidFill>
+                <a:latin typeface="Yu Mincho"/>
+              </a:defRPr>
+            </a:pPr>
+            <a:r>
+              <a:t>宇部 光太</a:t>
+            </a:r>
+          </a:p>
+        </p:txBody>
+      </p:sp>
+      <p:sp>
+        <p:nvSpPr>
+          <p:cNvPr id="6" name="TextBox 5"/>
+          <p:cNvSpPr txBox="1"/>
+          <p:nvPr/>
+        </p:nvSpPr>
+        <p:spPr>
+          <a:xfrm>
+            <a:off x="4258666" y="6178550"/>
+            <a:ext cx="3674566" cy="501649"/>
+          </a:xfrm>
+          <a:prstGeom prst="rect">
+            <a:avLst/>
+          </a:prstGeom>
+          <a:noFill/>
+        </p:spPr>
+        <p:txBody>
+          <a:bodyPr wrap="square" lIns="0" rIns="0" tIns="0" bIns="0" anchor="t">
+            <a:spAutoFit/>
+          </a:bodyPr>
+          <a:lstStyle/>
+          <a:p>
+            <a:pPr algn="l">
+              <a:lnSpc>
+                <a:spcPct val="120000"/>
+              </a:lnSpc>
+              <a:spcBef>
+                <a:spcPts val="0"/>
+              </a:spcBef>
+              <a:spcAft>
+                <a:spcPts val="0"/>
+              </a:spcAft>
+              <a:defRPr sz="2700" b="1">
+                <a:solidFill>
+                  <a:srgbClr val="F4EEE4"/>
+                </a:solidFill>
+                <a:latin typeface="Yu Mincho"/>
+              </a:defRPr>
+            </a:pPr>
+            <a:r>
+              <a:t>山田 研二</a:t>
+            </a:r>
+          </a:p>
+        </p:txBody>
+      </p:sp>
+      <p:sp>
+        <p:nvSpPr>
+          <p:cNvPr id="7" name="TextBox 6"/>
+          <p:cNvSpPr txBox="1"/>
+          <p:nvPr/>
+        </p:nvSpPr>
+        <p:spPr>
+          <a:xfrm>
+            <a:off x="8111032" y="6178550"/>
+            <a:ext cx="3674566" cy="501649"/>
+          </a:xfrm>
+          <a:prstGeom prst="rect">
+            <a:avLst/>
+          </a:prstGeom>
+          <a:noFill/>
+        </p:spPr>
+        <p:txBody>
+          <a:bodyPr wrap="square" lIns="0" rIns="0" tIns="0" bIns="0" anchor="t">
+            <a:spAutoFit/>
+          </a:bodyPr>
+          <a:lstStyle/>
+          <a:p>
+            <a:pPr algn="l">
+              <a:lnSpc>
+                <a:spcPct val="120000"/>
+              </a:lnSpc>
+              <a:spcBef>
+                <a:spcPts val="0"/>
+              </a:spcBef>
+              <a:spcAft>
+                <a:spcPts val="0"/>
+              </a:spcAft>
+              <a:defRPr sz="2700" b="1">
+                <a:solidFill>
+                  <a:srgbClr val="F4EEE4"/>
+                </a:solidFill>
+                <a:latin typeface="Yu Mincho"/>
+              </a:defRPr>
+            </a:pPr>
+            <a:r>
+              <a:t>あらい ひとみ</a:t>
+            </a:r>
+          </a:p>
+        </p:txBody>
+      </p:sp>
     </p:spTree>
   </p:cSld>
   <p:clrMapOvr>
@@ -3397,7 +4632,7 @@
       <p:grpSpPr/>
       <p:pic>
         <p:nvPicPr>
-          <p:cNvPr id="2" name="Picture 1" descr="02_00.jpg"/>
+          <p:cNvPr id="2" name="Picture 1" descr="02_bg.jpg"/>
           <p:cNvPicPr>
             <a:picLocks noChangeAspect="1"/>
           </p:cNvPicPr>
@@ -3419,6 +4654,118 @@
           </a:prstGeom>
         </p:spPr>
       </p:pic>
+      <p:sp>
+        <p:nvSpPr>
+          <p:cNvPr id="3" name="TextBox 2"/>
+          <p:cNvSpPr txBox="1"/>
+          <p:nvPr/>
+        </p:nvSpPr>
+        <p:spPr>
+          <a:xfrm>
+            <a:off x="609599" y="2285603"/>
+            <a:ext cx="9662119" cy="457200"/>
+          </a:xfrm>
+          <a:prstGeom prst="rect">
+            <a:avLst/>
+          </a:prstGeom>
+          <a:noFill/>
+        </p:spPr>
+        <p:txBody>
+          <a:bodyPr wrap="square" lIns="0" rIns="0" tIns="0" bIns="0" anchor="t">
+            <a:spAutoFit/>
+          </a:bodyPr>
+          <a:lstStyle/>
+          <a:p>
+            <a:pPr algn="l">
+              <a:lnSpc>
+                <a:spcPct val="120000"/>
+              </a:lnSpc>
+              <a:spcBef>
+                <a:spcPts val="0"/>
+              </a:spcBef>
+              <a:spcAft>
+                <a:spcPts val="0"/>
+              </a:spcAft>
+              <a:defRPr sz="2500" b="1">
+                <a:solidFill>
+                  <a:srgbClr val="D4B36A"/>
+                </a:solidFill>
+                <a:latin typeface="Meiryo"/>
+              </a:defRPr>
+            </a:pPr>
+            <a:r>
+              <a:t>2025年5月</a:t>
+            </a:r>
+          </a:p>
+        </p:txBody>
+      </p:sp>
+      <p:sp>
+        <p:nvSpPr>
+          <p:cNvPr id="4" name="TextBox 3"/>
+          <p:cNvSpPr txBox="1"/>
+          <p:nvPr/>
+        </p:nvSpPr>
+        <p:spPr>
+          <a:xfrm>
+            <a:off x="609599" y="2838053"/>
+            <a:ext cx="9662119" cy="1752599"/>
+          </a:xfrm>
+          <a:prstGeom prst="rect">
+            <a:avLst/>
+          </a:prstGeom>
+          <a:noFill/>
+        </p:spPr>
+        <p:txBody>
+          <a:bodyPr wrap="square" lIns="0" rIns="0" tIns="0" bIns="0" anchor="t">
+            <a:spAutoFit/>
+          </a:bodyPr>
+          <a:lstStyle/>
+          <a:p>
+            <a:pPr algn="l">
+              <a:lnSpc>
+                <a:spcPct val="115000"/>
+              </a:lnSpc>
+              <a:spcBef>
+                <a:spcPts val="0"/>
+              </a:spcBef>
+              <a:spcAft>
+                <a:spcPts val="0"/>
+              </a:spcAft>
+              <a:defRPr sz="6000" b="1">
+                <a:solidFill>
+                  <a:srgbClr val="F4EEE4"/>
+                </a:solidFill>
+                <a:latin typeface="Yu Mincho"/>
+              </a:defRPr>
+            </a:pPr>
+            <a:r>
+              <a:t>Reyel、</a:t>
+            </a:r>
+          </a:p>
+          <a:p>
+            <a:pPr algn="l">
+              <a:lnSpc>
+                <a:spcPct val="115000"/>
+              </a:lnSpc>
+              <a:spcBef>
+                <a:spcPts val="0"/>
+              </a:spcBef>
+              <a:spcAft>
+                <a:spcPts val="0"/>
+              </a:spcAft>
+              <a:defRPr sz="6000" b="1">
+                <a:solidFill>
+                  <a:srgbClr val="F4EEE4"/>
+                </a:solidFill>
+                <a:latin typeface="Yu Mincho"/>
+              </a:defRPr>
+            </a:pPr>
+            <a:r>
+              <a:t>FC化スタート。</a:t>
+            </a:r>
+          </a:p>
+        </p:txBody>
+      </p:sp>
     </p:spTree>
   </p:cSld>
   <p:clrMapOvr>
@@ -3439,7 +4786,7 @@
       <p:grpSpPr/>
       <p:pic>
         <p:nvPicPr>
-          <p:cNvPr id="2" name="Picture 1" descr="03_00.jpg"/>
+          <p:cNvPr id="2" name="Picture 1" descr="03_bg.jpg"/>
           <p:cNvPicPr>
             <a:picLocks noChangeAspect="1"/>
           </p:cNvPicPr>
@@ -3461,6 +4808,118 @@
           </a:prstGeom>
         </p:spPr>
       </p:pic>
+      <p:sp>
+        <p:nvSpPr>
+          <p:cNvPr id="3" name="TextBox 2"/>
+          <p:cNvSpPr txBox="1"/>
+          <p:nvPr/>
+        </p:nvSpPr>
+        <p:spPr>
+          <a:xfrm>
+            <a:off x="609599" y="2285603"/>
+            <a:ext cx="9662119" cy="457200"/>
+          </a:xfrm>
+          <a:prstGeom prst="rect">
+            <a:avLst/>
+          </a:prstGeom>
+          <a:noFill/>
+        </p:spPr>
+        <p:txBody>
+          <a:bodyPr wrap="square" lIns="0" rIns="0" tIns="0" bIns="0" anchor="t">
+            <a:spAutoFit/>
+          </a:bodyPr>
+          <a:lstStyle/>
+          <a:p>
+            <a:pPr algn="l">
+              <a:lnSpc>
+                <a:spcPct val="120000"/>
+              </a:lnSpc>
+              <a:spcBef>
+                <a:spcPts val="0"/>
+              </a:spcBef>
+              <a:spcAft>
+                <a:spcPts val="0"/>
+              </a:spcAft>
+              <a:defRPr sz="2500" b="1">
+                <a:solidFill>
+                  <a:srgbClr val="D4B36A"/>
+                </a:solidFill>
+                <a:latin typeface="Meiryo"/>
+              </a:defRPr>
+            </a:pPr>
+            <a:r>
+              <a:t>2025年夏</a:t>
+            </a:r>
+          </a:p>
+        </p:txBody>
+      </p:sp>
+      <p:sp>
+        <p:nvSpPr>
+          <p:cNvPr id="4" name="TextBox 3"/>
+          <p:cNvSpPr txBox="1"/>
+          <p:nvPr/>
+        </p:nvSpPr>
+        <p:spPr>
+          <a:xfrm>
+            <a:off x="609599" y="2838053"/>
+            <a:ext cx="9662119" cy="1752599"/>
+          </a:xfrm>
+          <a:prstGeom prst="rect">
+            <a:avLst/>
+          </a:prstGeom>
+          <a:noFill/>
+        </p:spPr>
+        <p:txBody>
+          <a:bodyPr wrap="square" lIns="0" rIns="0" tIns="0" bIns="0" anchor="t">
+            <a:spAutoFit/>
+          </a:bodyPr>
+          <a:lstStyle/>
+          <a:p>
+            <a:pPr algn="l">
+              <a:lnSpc>
+                <a:spcPct val="115000"/>
+              </a:lnSpc>
+              <a:spcBef>
+                <a:spcPts val="0"/>
+              </a:spcBef>
+              <a:spcAft>
+                <a:spcPts val="0"/>
+              </a:spcAft>
+              <a:defRPr sz="6000" b="1">
+                <a:solidFill>
+                  <a:srgbClr val="F4EEE4"/>
+                </a:solidFill>
+                <a:latin typeface="Yu Mincho"/>
+              </a:defRPr>
+            </a:pPr>
+            <a:r>
+              <a:t>会話が、</a:t>
+            </a:r>
+          </a:p>
+          <a:p>
+            <a:pPr algn="l">
+              <a:lnSpc>
+                <a:spcPct val="115000"/>
+              </a:lnSpc>
+              <a:spcBef>
+                <a:spcPts val="0"/>
+              </a:spcBef>
+              <a:spcAft>
+                <a:spcPts val="0"/>
+              </a:spcAft>
+              <a:defRPr sz="6000" b="1">
+                <a:solidFill>
+                  <a:srgbClr val="F4EEE4"/>
+                </a:solidFill>
+                <a:latin typeface="Yu Mincho"/>
+              </a:defRPr>
+            </a:pPr>
+            <a:r>
+              <a:t>噛み合わない。</a:t>
+            </a:r>
+          </a:p>
+        </p:txBody>
+      </p:sp>
     </p:spTree>
   </p:cSld>
   <p:clrMapOvr>
@@ -3481,7 +4940,7 @@
       <p:grpSpPr/>
       <p:pic>
         <p:nvPicPr>
-          <p:cNvPr id="2" name="Picture 1" descr="04_00.jpg"/>
+          <p:cNvPr id="2" name="Picture 1" descr="04_bg.jpg"/>
           <p:cNvPicPr>
             <a:picLocks noChangeAspect="1"/>
           </p:cNvPicPr>
@@ -3503,6 +4962,118 @@
           </a:prstGeom>
         </p:spPr>
       </p:pic>
+      <p:sp>
+        <p:nvSpPr>
+          <p:cNvPr id="3" name="TextBox 2"/>
+          <p:cNvSpPr txBox="1"/>
+          <p:nvPr/>
+        </p:nvSpPr>
+        <p:spPr>
+          <a:xfrm>
+            <a:off x="609599" y="1930896"/>
+            <a:ext cx="9662119" cy="1752599"/>
+          </a:xfrm>
+          <a:prstGeom prst="rect">
+            <a:avLst/>
+          </a:prstGeom>
+          <a:noFill/>
+        </p:spPr>
+        <p:txBody>
+          <a:bodyPr wrap="square" lIns="0" rIns="0" tIns="0" bIns="0" anchor="t">
+            <a:spAutoFit/>
+          </a:bodyPr>
+          <a:lstStyle/>
+          <a:p>
+            <a:pPr algn="l">
+              <a:lnSpc>
+                <a:spcPct val="115000"/>
+              </a:lnSpc>
+              <a:spcBef>
+                <a:spcPts val="0"/>
+              </a:spcBef>
+              <a:spcAft>
+                <a:spcPts val="0"/>
+              </a:spcAft>
+              <a:defRPr sz="6000" b="1">
+                <a:solidFill>
+                  <a:srgbClr val="F4EEE4"/>
+                </a:solidFill>
+                <a:latin typeface="Yu Mincho"/>
+              </a:defRPr>
+            </a:pPr>
+            <a:r>
+              <a:t>同じ覚悟で、</a:t>
+            </a:r>
+          </a:p>
+          <a:p>
+            <a:pPr algn="l">
+              <a:lnSpc>
+                <a:spcPct val="115000"/>
+              </a:lnSpc>
+              <a:spcBef>
+                <a:spcPts val="0"/>
+              </a:spcBef>
+              <a:spcAft>
+                <a:spcPts val="0"/>
+              </a:spcAft>
+              <a:defRPr sz="6000" b="1">
+                <a:solidFill>
+                  <a:srgbClr val="F4EEE4"/>
+                </a:solidFill>
+                <a:latin typeface="Yu Mincho"/>
+              </a:defRPr>
+            </a:pPr>
+            <a:r>
+              <a:t>法人を。</a:t>
+            </a:r>
+          </a:p>
+        </p:txBody>
+      </p:sp>
+      <p:sp>
+        <p:nvSpPr>
+          <p:cNvPr id="4" name="TextBox 3"/>
+          <p:cNvSpPr txBox="1"/>
+          <p:nvPr/>
+        </p:nvSpPr>
+        <p:spPr>
+          <a:xfrm>
+            <a:off x="609599" y="3683496"/>
+            <a:ext cx="9662119" cy="1261864"/>
+          </a:xfrm>
+          <a:prstGeom prst="rect">
+            <a:avLst/>
+          </a:prstGeom>
+          <a:noFill/>
+        </p:spPr>
+        <p:txBody>
+          <a:bodyPr wrap="square" lIns="0" rIns="0" tIns="0" bIns="0" anchor="t">
+            <a:spAutoFit/>
+          </a:bodyPr>
+          <a:lstStyle/>
+          <a:p>
+            <a:pPr algn="l">
+              <a:lnSpc>
+                <a:spcPct val="138000"/>
+              </a:lnSpc>
+              <a:spcBef>
+                <a:spcPts val="0"/>
+              </a:spcBef>
+              <a:spcAft>
+                <a:spcPts val="0"/>
+              </a:spcAft>
+              <a:defRPr sz="3600" b="1">
+                <a:solidFill>
+                  <a:srgbClr val="F4EEE4"/>
+                </a:solidFill>
+                <a:latin typeface="Yu Mincho"/>
+              </a:defRPr>
+            </a:pPr>
+            <a:r>
+              <a:t>「日本一を目指す。一緒に法人を立ち上げよう」</a:t>
+            </a:r>
+          </a:p>
+        </p:txBody>
+      </p:sp>
     </p:spTree>
   </p:cSld>
   <p:clrMapOvr>
@@ -3523,7 +5094,7 @@
       <p:grpSpPr/>
       <p:pic>
         <p:nvPicPr>
-          <p:cNvPr id="2" name="Picture 1" descr="05_00.jpg"/>
+          <p:cNvPr id="2" name="Picture 1" descr="05_bg.jpg"/>
           <p:cNvPicPr>
             <a:picLocks noChangeAspect="1"/>
           </p:cNvPicPr>
@@ -3545,6 +5116,73 @@
           </a:prstGeom>
         </p:spPr>
       </p:pic>
+      <p:sp>
+        <p:nvSpPr>
+          <p:cNvPr id="3" name="TextBox 2"/>
+          <p:cNvSpPr txBox="1"/>
+          <p:nvPr/>
+        </p:nvSpPr>
+        <p:spPr>
+          <a:xfrm>
+            <a:off x="609599" y="2561828"/>
+            <a:ext cx="9662119" cy="1752599"/>
+          </a:xfrm>
+          <a:prstGeom prst="rect">
+            <a:avLst/>
+          </a:prstGeom>
+          <a:noFill/>
+        </p:spPr>
+        <p:txBody>
+          <a:bodyPr wrap="square" lIns="0" rIns="0" tIns="0" bIns="0" anchor="t">
+            <a:spAutoFit/>
+          </a:bodyPr>
+          <a:lstStyle/>
+          <a:p>
+            <a:pPr algn="l">
+              <a:lnSpc>
+                <a:spcPct val="115000"/>
+              </a:lnSpc>
+              <a:spcBef>
+                <a:spcPts val="0"/>
+              </a:spcBef>
+              <a:spcAft>
+                <a:spcPts val="0"/>
+              </a:spcAft>
+              <a:defRPr sz="6000" b="1">
+                <a:solidFill>
+                  <a:srgbClr val="F4EEE4"/>
+                </a:solidFill>
+                <a:latin typeface="Yu Mincho"/>
+              </a:defRPr>
+            </a:pPr>
+            <a:r>
+              <a:t>視線は、</a:t>
+            </a:r>
+          </a:p>
+          <a:p>
+            <a:pPr algn="l">
+              <a:lnSpc>
+                <a:spcPct val="115000"/>
+              </a:lnSpc>
+              <a:spcBef>
+                <a:spcPts val="0"/>
+              </a:spcBef>
+              <a:spcAft>
+                <a:spcPts val="0"/>
+              </a:spcAft>
+              <a:defRPr sz="6000" b="1">
+                <a:solidFill>
+                  <a:srgbClr val="F4EEE4"/>
+                </a:solidFill>
+                <a:latin typeface="Yu Mincho"/>
+              </a:defRPr>
+            </a:pPr>
+            <a:r>
+              <a:t>TSUKIMISOUへ。</a:t>
+            </a:r>
+          </a:p>
+        </p:txBody>
+      </p:sp>
     </p:spTree>
   </p:cSld>
   <p:clrMapOvr>
@@ -3565,7 +5203,7 @@
       <p:grpSpPr/>
       <p:pic>
         <p:nvPicPr>
-          <p:cNvPr id="2" name="Picture 1" descr="06_00.jpg"/>
+          <p:cNvPr id="2" name="Picture 1" descr="06_bg.jpg"/>
           <p:cNvPicPr>
             <a:picLocks noChangeAspect="1"/>
           </p:cNvPicPr>
@@ -3587,6 +5225,118 @@
           </a:prstGeom>
         </p:spPr>
       </p:pic>
+      <p:sp>
+        <p:nvSpPr>
+          <p:cNvPr id="3" name="TextBox 2"/>
+          <p:cNvSpPr txBox="1"/>
+          <p:nvPr/>
+        </p:nvSpPr>
+        <p:spPr>
+          <a:xfrm>
+            <a:off x="609599" y="2285603"/>
+            <a:ext cx="9662119" cy="457200"/>
+          </a:xfrm>
+          <a:prstGeom prst="rect">
+            <a:avLst/>
+          </a:prstGeom>
+          <a:noFill/>
+        </p:spPr>
+        <p:txBody>
+          <a:bodyPr wrap="square" lIns="0" rIns="0" tIns="0" bIns="0" anchor="t">
+            <a:spAutoFit/>
+          </a:bodyPr>
+          <a:lstStyle/>
+          <a:p>
+            <a:pPr algn="l">
+              <a:lnSpc>
+                <a:spcPct val="120000"/>
+              </a:lnSpc>
+              <a:spcBef>
+                <a:spcPts val="0"/>
+              </a:spcBef>
+              <a:spcAft>
+                <a:spcPts val="0"/>
+              </a:spcAft>
+              <a:defRPr sz="2500" b="1">
+                <a:solidFill>
+                  <a:srgbClr val="D4B36A"/>
+                </a:solidFill>
+                <a:latin typeface="Meiryo"/>
+              </a:defRPr>
+            </a:pPr>
+            <a:r>
+              <a:t>2025年冬　北本</a:t>
+            </a:r>
+          </a:p>
+        </p:txBody>
+      </p:sp>
+      <p:sp>
+        <p:nvSpPr>
+          <p:cNvPr id="4" name="TextBox 3"/>
+          <p:cNvSpPr txBox="1"/>
+          <p:nvPr/>
+        </p:nvSpPr>
+        <p:spPr>
+          <a:xfrm>
+            <a:off x="609599" y="2838053"/>
+            <a:ext cx="9662119" cy="1752599"/>
+          </a:xfrm>
+          <a:prstGeom prst="rect">
+            <a:avLst/>
+          </a:prstGeom>
+          <a:noFill/>
+        </p:spPr>
+        <p:txBody>
+          <a:bodyPr wrap="square" lIns="0" rIns="0" tIns="0" bIns="0" anchor="t">
+            <a:spAutoFit/>
+          </a:bodyPr>
+          <a:lstStyle/>
+          <a:p>
+            <a:pPr algn="l">
+              <a:lnSpc>
+                <a:spcPct val="115000"/>
+              </a:lnSpc>
+              <a:spcBef>
+                <a:spcPts val="0"/>
+              </a:spcBef>
+              <a:spcAft>
+                <a:spcPts val="0"/>
+              </a:spcAft>
+              <a:defRPr sz="6000" b="1">
+                <a:solidFill>
+                  <a:srgbClr val="F4EEE4"/>
+                </a:solidFill>
+                <a:latin typeface="Yu Mincho"/>
+              </a:defRPr>
+            </a:pPr>
+            <a:r>
+              <a:t>「一緒に日本一を</a:t>
+            </a:r>
+          </a:p>
+          <a:p>
+            <a:pPr algn="l">
+              <a:lnSpc>
+                <a:spcPct val="115000"/>
+              </a:lnSpc>
+              <a:spcBef>
+                <a:spcPts val="0"/>
+              </a:spcBef>
+              <a:spcAft>
+                <a:spcPts val="0"/>
+              </a:spcAft>
+              <a:defRPr sz="6000" b="1">
+                <a:solidFill>
+                  <a:srgbClr val="F4EEE4"/>
+                </a:solidFill>
+                <a:latin typeface="Yu Mincho"/>
+              </a:defRPr>
+            </a:pPr>
+            <a:r>
+              <a:t>目指そう」</a:t>
+            </a:r>
+          </a:p>
+        </p:txBody>
+      </p:sp>
     </p:spTree>
   </p:cSld>
   <p:clrMapOvr>
@@ -3607,7 +5357,7 @@
       <p:grpSpPr/>
       <p:pic>
         <p:nvPicPr>
-          <p:cNvPr id="2" name="Picture 1" descr="07_00.jpg"/>
+          <p:cNvPr id="2" name="Picture 1" descr="07_bg.jpg"/>
           <p:cNvPicPr>
             <a:picLocks noChangeAspect="1"/>
           </p:cNvPicPr>
@@ -3629,6 +5379,51 @@
           </a:prstGeom>
         </p:spPr>
       </p:pic>
+      <p:sp>
+        <p:nvSpPr>
+          <p:cNvPr id="3" name="TextBox 2"/>
+          <p:cNvSpPr txBox="1"/>
+          <p:nvPr/>
+        </p:nvSpPr>
+        <p:spPr>
+          <a:xfrm>
+            <a:off x="609599" y="2999978"/>
+            <a:ext cx="9662119" cy="876299"/>
+          </a:xfrm>
+          <a:prstGeom prst="rect">
+            <a:avLst/>
+          </a:prstGeom>
+          <a:noFill/>
+        </p:spPr>
+        <p:txBody>
+          <a:bodyPr wrap="square" lIns="0" rIns="0" tIns="0" bIns="0" anchor="t">
+            <a:spAutoFit/>
+          </a:bodyPr>
+          <a:lstStyle/>
+          <a:p>
+            <a:pPr algn="l">
+              <a:lnSpc>
+                <a:spcPct val="115000"/>
+              </a:lnSpc>
+              <a:spcBef>
+                <a:spcPts val="0"/>
+              </a:spcBef>
+              <a:spcAft>
+                <a:spcPts val="0"/>
+              </a:spcAft>
+              <a:defRPr sz="6000" b="1">
+                <a:solidFill>
+                  <a:srgbClr val="F4EEE4"/>
+                </a:solidFill>
+                <a:latin typeface="Yu Mincho"/>
+              </a:defRPr>
+            </a:pPr>
+            <a:r>
+              <a:t>〆氷を、つくろう。</a:t>
+            </a:r>
+          </a:p>
+        </p:txBody>
+      </p:sp>
     </p:spTree>
   </p:cSld>
   <p:clrMapOvr>
@@ -3649,7 +5444,7 @@
       <p:grpSpPr/>
       <p:pic>
         <p:nvPicPr>
-          <p:cNvPr id="2" name="Picture 1" descr="08_00.jpg"/>
+          <p:cNvPr id="2" name="Picture 1" descr="08_bg.jpg"/>
           <p:cNvPicPr>
             <a:picLocks noChangeAspect="1"/>
           </p:cNvPicPr>
@@ -3671,6 +5466,73 @@
           </a:prstGeom>
         </p:spPr>
       </p:pic>
+      <p:sp>
+        <p:nvSpPr>
+          <p:cNvPr id="3" name="TextBox 2"/>
+          <p:cNvSpPr txBox="1"/>
+          <p:nvPr/>
+        </p:nvSpPr>
+        <p:spPr>
+          <a:xfrm>
+            <a:off x="609599" y="2561828"/>
+            <a:ext cx="9662119" cy="1752599"/>
+          </a:xfrm>
+          <a:prstGeom prst="rect">
+            <a:avLst/>
+          </a:prstGeom>
+          <a:noFill/>
+        </p:spPr>
+        <p:txBody>
+          <a:bodyPr wrap="square" lIns="0" rIns="0" tIns="0" bIns="0" anchor="t">
+            <a:spAutoFit/>
+          </a:bodyPr>
+          <a:lstStyle/>
+          <a:p>
+            <a:pPr algn="l">
+              <a:lnSpc>
+                <a:spcPct val="115000"/>
+              </a:lnSpc>
+              <a:spcBef>
+                <a:spcPts val="0"/>
+              </a:spcBef>
+              <a:spcAft>
+                <a:spcPts val="0"/>
+              </a:spcAft>
+              <a:defRPr sz="6000" b="1">
+                <a:solidFill>
+                  <a:srgbClr val="F4EEE4"/>
+                </a:solidFill>
+                <a:latin typeface="Yu Mincho"/>
+              </a:defRPr>
+            </a:pPr>
+            <a:r>
+              <a:t>三人の覚悟が、</a:t>
+            </a:r>
+          </a:p>
+          <a:p>
+            <a:pPr algn="l">
+              <a:lnSpc>
+                <a:spcPct val="115000"/>
+              </a:lnSpc>
+              <a:spcBef>
+                <a:spcPts val="0"/>
+              </a:spcBef>
+              <a:spcAft>
+                <a:spcPts val="0"/>
+              </a:spcAft>
+              <a:defRPr sz="6000" b="1">
+                <a:solidFill>
+                  <a:srgbClr val="F4EEE4"/>
+                </a:solidFill>
+                <a:latin typeface="Yu Mincho"/>
+              </a:defRPr>
+            </a:pPr>
+            <a:r>
+              <a:t>ひとつになった。</a:t>
+            </a:r>
+          </a:p>
+        </p:txBody>
+      </p:sp>
     </p:spTree>
   </p:cSld>
   <p:clrMapOvr>

--- a/docs/grano_share_10min.pptx
+++ b/docs/grano_share_10min.pptx
@@ -3992,51 +3992,6 @@
           </a:p>
         </p:txBody>
       </p:sp>
-      <p:sp>
-        <p:nvSpPr>
-          <p:cNvPr id="8" name="TextBox 7"/>
-          <p:cNvSpPr txBox="1"/>
-          <p:nvPr/>
-        </p:nvSpPr>
-        <p:spPr>
-          <a:xfrm>
-            <a:off x="8195666" y="3733700"/>
-            <a:ext cx="3386633" cy="514350"/>
-          </a:xfrm>
-          <a:prstGeom prst="rect">
-            <a:avLst/>
-          </a:prstGeom>
-          <a:noFill/>
-        </p:spPr>
-        <p:txBody>
-          <a:bodyPr wrap="square" lIns="0" rIns="0" tIns="0" bIns="0" anchor="t">
-            <a:spAutoFit/>
-          </a:bodyPr>
-          <a:lstStyle/>
-          <a:p>
-            <a:pPr algn="l">
-              <a:lnSpc>
-                <a:spcPct val="120000"/>
-              </a:lnSpc>
-              <a:spcBef>
-                <a:spcPts val="0"/>
-              </a:spcBef>
-              <a:spcAft>
-                <a:spcPts val="0"/>
-              </a:spcAft>
-              <a:defRPr sz="2800" b="1">
-                <a:solidFill>
-                  <a:srgbClr val="F4EEE4"/>
-                </a:solidFill>
-                <a:latin typeface="Meiryo"/>
-              </a:defRPr>
-            </a:pPr>
-            <a:r>
-              <a:t>次は年商</a:t>
-            </a:r>
-          </a:p>
-        </p:txBody>
-      </p:sp>
     </p:spTree>
   </p:cSld>
   <p:clrMapOvr>
@@ -4295,7 +4250,7 @@
               </a:defRPr>
             </a:pPr>
             <a:r>
-              <a:t>40歳以下。０から１を。</a:t>
+              <a:t>40歳以下</a:t>
             </a:r>
           </a:p>
         </p:txBody>
@@ -4473,141 +4428,6 @@
             </a:pPr>
             <a:r>
               <a:t>三人は、別々の道を歩いていた。</a:t>
-            </a:r>
-          </a:p>
-        </p:txBody>
-      </p:sp>
-      <p:sp>
-        <p:nvSpPr>
-          <p:cNvPr id="5" name="TextBox 4"/>
-          <p:cNvSpPr txBox="1"/>
-          <p:nvPr/>
-        </p:nvSpPr>
-        <p:spPr>
-          <a:xfrm>
-            <a:off x="406399" y="6178550"/>
-            <a:ext cx="3674466" cy="501649"/>
-          </a:xfrm>
-          <a:prstGeom prst="rect">
-            <a:avLst/>
-          </a:prstGeom>
-          <a:noFill/>
-        </p:spPr>
-        <p:txBody>
-          <a:bodyPr wrap="square" lIns="0" rIns="0" tIns="0" bIns="0" anchor="t">
-            <a:spAutoFit/>
-          </a:bodyPr>
-          <a:lstStyle/>
-          <a:p>
-            <a:pPr algn="l">
-              <a:lnSpc>
-                <a:spcPct val="120000"/>
-              </a:lnSpc>
-              <a:spcBef>
-                <a:spcPts val="0"/>
-              </a:spcBef>
-              <a:spcAft>
-                <a:spcPts val="0"/>
-              </a:spcAft>
-              <a:defRPr sz="2700" b="1">
-                <a:solidFill>
-                  <a:srgbClr val="F4EEE4"/>
-                </a:solidFill>
-                <a:latin typeface="Yu Mincho"/>
-              </a:defRPr>
-            </a:pPr>
-            <a:r>
-              <a:t>宇部 光太</a:t>
-            </a:r>
-          </a:p>
-        </p:txBody>
-      </p:sp>
-      <p:sp>
-        <p:nvSpPr>
-          <p:cNvPr id="6" name="TextBox 5"/>
-          <p:cNvSpPr txBox="1"/>
-          <p:nvPr/>
-        </p:nvSpPr>
-        <p:spPr>
-          <a:xfrm>
-            <a:off x="4258666" y="6178550"/>
-            <a:ext cx="3674566" cy="501649"/>
-          </a:xfrm>
-          <a:prstGeom prst="rect">
-            <a:avLst/>
-          </a:prstGeom>
-          <a:noFill/>
-        </p:spPr>
-        <p:txBody>
-          <a:bodyPr wrap="square" lIns="0" rIns="0" tIns="0" bIns="0" anchor="t">
-            <a:spAutoFit/>
-          </a:bodyPr>
-          <a:lstStyle/>
-          <a:p>
-            <a:pPr algn="l">
-              <a:lnSpc>
-                <a:spcPct val="120000"/>
-              </a:lnSpc>
-              <a:spcBef>
-                <a:spcPts val="0"/>
-              </a:spcBef>
-              <a:spcAft>
-                <a:spcPts val="0"/>
-              </a:spcAft>
-              <a:defRPr sz="2700" b="1">
-                <a:solidFill>
-                  <a:srgbClr val="F4EEE4"/>
-                </a:solidFill>
-                <a:latin typeface="Yu Mincho"/>
-              </a:defRPr>
-            </a:pPr>
-            <a:r>
-              <a:t>山田 研二</a:t>
-            </a:r>
-          </a:p>
-        </p:txBody>
-      </p:sp>
-      <p:sp>
-        <p:nvSpPr>
-          <p:cNvPr id="7" name="TextBox 6"/>
-          <p:cNvSpPr txBox="1"/>
-          <p:nvPr/>
-        </p:nvSpPr>
-        <p:spPr>
-          <a:xfrm>
-            <a:off x="8111032" y="6178550"/>
-            <a:ext cx="3674566" cy="501649"/>
-          </a:xfrm>
-          <a:prstGeom prst="rect">
-            <a:avLst/>
-          </a:prstGeom>
-          <a:noFill/>
-        </p:spPr>
-        <p:txBody>
-          <a:bodyPr wrap="square" lIns="0" rIns="0" tIns="0" bIns="0" anchor="t">
-            <a:spAutoFit/>
-          </a:bodyPr>
-          <a:lstStyle/>
-          <a:p>
-            <a:pPr algn="l">
-              <a:lnSpc>
-                <a:spcPct val="120000"/>
-              </a:lnSpc>
-              <a:spcBef>
-                <a:spcPts val="0"/>
-              </a:spcBef>
-              <a:spcAft>
-                <a:spcPts val="0"/>
-              </a:spcAft>
-              <a:defRPr sz="2700" b="1">
-                <a:solidFill>
-                  <a:srgbClr val="F4EEE4"/>
-                </a:solidFill>
-                <a:latin typeface="Yu Mincho"/>
-              </a:defRPr>
-            </a:pPr>
-            <a:r>
-              <a:t>あらい ひとみ</a:t>
             </a:r>
           </a:p>
         </p:txBody>
